--- a/deck/Storybook.pptx
+++ b/deck/Storybook.pptx
@@ -2530,7 +2530,7 @@
         <p:spPr>
           <a:xfrm>
             <a:off x="841248" y="1325880"/>
-            <a:ext cx="3241365" cy="310896"/>
+            <a:ext cx="3813414" cy="310896"/>
           </a:xfrm>
           <a:prstGeom prst="roundRect">
             <a:avLst>
@@ -2552,7 +2552,7 @@
         <p:spPr>
           <a:xfrm>
             <a:off x="841248" y="1325880"/>
-            <a:ext cx="3241365" cy="310896"/>
+            <a:ext cx="3813414" cy="310896"/>
           </a:xfrm>
           <a:prstGeom prst="rect">
             <a:avLst/>
@@ -2964,7 +2964,7 @@
         <p:spPr>
           <a:xfrm>
             <a:off x="548640" y="420624"/>
-            <a:ext cx="1212494" cy="310896"/>
+            <a:ext cx="1383487" cy="310896"/>
           </a:xfrm>
           <a:prstGeom prst="roundRect">
             <a:avLst>
@@ -2986,7 +2986,7 @@
         <p:spPr>
           <a:xfrm>
             <a:off x="548640" y="420624"/>
-            <a:ext cx="1212494" cy="310896"/>
+            <a:ext cx="1383487" cy="310896"/>
           </a:xfrm>
           <a:prstGeom prst="rect">
             <a:avLst/>
@@ -4664,7 +4664,7 @@
         <p:spPr>
           <a:xfrm>
             <a:off x="548640" y="420624"/>
-            <a:ext cx="1385499" cy="310896"/>
+            <a:ext cx="1590690" cy="310896"/>
           </a:xfrm>
           <a:prstGeom prst="roundRect">
             <a:avLst>
@@ -4686,7 +4686,7 @@
         <p:spPr>
           <a:xfrm>
             <a:off x="548640" y="420624"/>
-            <a:ext cx="1385499" cy="310896"/>
+            <a:ext cx="1590690" cy="310896"/>
           </a:xfrm>
           <a:prstGeom prst="rect">
             <a:avLst/>
@@ -5942,7 +5942,7 @@
         <p:spPr>
           <a:xfrm>
             <a:off x="548640" y="420624"/>
-            <a:ext cx="1472001" cy="310896"/>
+            <a:ext cx="1694292" cy="310896"/>
           </a:xfrm>
           <a:prstGeom prst="roundRect">
             <a:avLst>
@@ -5964,7 +5964,7 @@
         <p:spPr>
           <a:xfrm>
             <a:off x="548640" y="420624"/>
-            <a:ext cx="1472001" cy="310896"/>
+            <a:ext cx="1694292" cy="310896"/>
           </a:xfrm>
           <a:prstGeom prst="rect">
             <a:avLst/>
@@ -7282,7 +7282,7 @@
         <p:spPr>
           <a:xfrm>
             <a:off x="548640" y="420624"/>
-            <a:ext cx="1818010" cy="310896"/>
+            <a:ext cx="2108698" cy="310896"/>
           </a:xfrm>
           <a:prstGeom prst="roundRect">
             <a:avLst>
@@ -7304,7 +7304,7 @@
         <p:spPr>
           <a:xfrm>
             <a:off x="548640" y="420624"/>
-            <a:ext cx="1818010" cy="310896"/>
+            <a:ext cx="2108698" cy="310896"/>
           </a:xfrm>
           <a:prstGeom prst="rect">
             <a:avLst/>
@@ -8319,7 +8319,7 @@
         <p:spPr>
           <a:xfrm>
             <a:off x="548640" y="420624"/>
-            <a:ext cx="1212494" cy="310896"/>
+            <a:ext cx="1383487" cy="310896"/>
           </a:xfrm>
           <a:prstGeom prst="roundRect">
             <a:avLst>
@@ -8341,7 +8341,7 @@
         <p:spPr>
           <a:xfrm>
             <a:off x="548640" y="420624"/>
-            <a:ext cx="1212494" cy="310896"/>
+            <a:ext cx="1383487" cy="310896"/>
           </a:xfrm>
           <a:prstGeom prst="rect">
             <a:avLst/>
@@ -9521,7 +9521,7 @@
         <p:spPr>
           <a:xfrm>
             <a:off x="548640" y="420624"/>
-            <a:ext cx="1039490" cy="310896"/>
+            <a:ext cx="1176284" cy="310896"/>
           </a:xfrm>
           <a:prstGeom prst="roundRect">
             <a:avLst>
@@ -9543,7 +9543,7 @@
         <p:spPr>
           <a:xfrm>
             <a:off x="548640" y="420624"/>
-            <a:ext cx="1039490" cy="310896"/>
+            <a:ext cx="1176284" cy="310896"/>
           </a:xfrm>
           <a:prstGeom prst="rect">
             <a:avLst/>
@@ -10851,7 +10851,7 @@
         <p:spPr>
           <a:xfrm>
             <a:off x="548640" y="640080"/>
-            <a:ext cx="1291133" cy="310896"/>
+            <a:ext cx="1477670" cy="310896"/>
           </a:xfrm>
           <a:prstGeom prst="roundRect">
             <a:avLst>
@@ -10873,7 +10873,7 @@
         <p:spPr>
           <a:xfrm>
             <a:off x="548640" y="640080"/>
-            <a:ext cx="1291133" cy="310896"/>
+            <a:ext cx="1477670" cy="310896"/>
           </a:xfrm>
           <a:prstGeom prst="rect">
             <a:avLst/>
@@ -11826,7 +11826,7 @@
         <p:spPr>
           <a:xfrm>
             <a:off x="548640" y="420624"/>
-            <a:ext cx="1645006" cy="310896"/>
+            <a:ext cx="1901495" cy="310896"/>
           </a:xfrm>
           <a:prstGeom prst="roundRect">
             <a:avLst>
@@ -11848,7 +11848,7 @@
         <p:spPr>
           <a:xfrm>
             <a:off x="548640" y="420624"/>
-            <a:ext cx="1645006" cy="310896"/>
+            <a:ext cx="1901495" cy="310896"/>
           </a:xfrm>
           <a:prstGeom prst="rect">
             <a:avLst/>
@@ -11960,7 +11960,7 @@
         <p:spPr>
           <a:xfrm>
             <a:off x="822960" y="1901952"/>
-            <a:ext cx="1298997" cy="310896"/>
+            <a:ext cx="1487089" cy="310896"/>
           </a:xfrm>
           <a:prstGeom prst="roundRect">
             <a:avLst>
@@ -11982,7 +11982,7 @@
         <p:spPr>
           <a:xfrm>
             <a:off x="822960" y="1901952"/>
-            <a:ext cx="1298997" cy="310896"/>
+            <a:ext cx="1487089" cy="310896"/>
           </a:xfrm>
           <a:prstGeom prst="rect">
             <a:avLst/>
@@ -12507,7 +12507,7 @@
         <p:spPr>
           <a:xfrm>
             <a:off x="6553048" y="1901952"/>
-            <a:ext cx="952988" cy="310896"/>
+            <a:ext cx="1072683" cy="310896"/>
           </a:xfrm>
           <a:prstGeom prst="roundRect">
             <a:avLst>
@@ -12529,7 +12529,7 @@
         <p:spPr>
           <a:xfrm>
             <a:off x="6553048" y="1901952"/>
-            <a:ext cx="952988" cy="310896"/>
+            <a:ext cx="1072683" cy="310896"/>
           </a:xfrm>
           <a:prstGeom prst="rect">
             <a:avLst/>
@@ -12919,7 +12919,7 @@
         <p:spPr>
           <a:xfrm>
             <a:off x="548640" y="420624"/>
-            <a:ext cx="1385499" cy="310896"/>
+            <a:ext cx="1590690" cy="310896"/>
           </a:xfrm>
           <a:prstGeom prst="roundRect">
             <a:avLst>
@@ -12941,7 +12941,7 @@
         <p:spPr>
           <a:xfrm>
             <a:off x="548640" y="420624"/>
-            <a:ext cx="1385499" cy="310896"/>
+            <a:ext cx="1590690" cy="310896"/>
           </a:xfrm>
           <a:prstGeom prst="rect">
             <a:avLst/>
@@ -14202,7 +14202,7 @@
         <p:spPr>
           <a:xfrm>
             <a:off x="548640" y="420624"/>
-            <a:ext cx="1731508" cy="310896"/>
+            <a:ext cx="2005096" cy="310896"/>
           </a:xfrm>
           <a:prstGeom prst="roundRect">
             <a:avLst>
@@ -14224,7 +14224,7 @@
         <p:spPr>
           <a:xfrm>
             <a:off x="548640" y="420624"/>
-            <a:ext cx="1731508" cy="310896"/>
+            <a:ext cx="2005096" cy="310896"/>
           </a:xfrm>
           <a:prstGeom prst="rect">
             <a:avLst/>
@@ -15141,7 +15141,7 @@
         <p:spPr>
           <a:xfrm>
             <a:off x="548640" y="420624"/>
-            <a:ext cx="2164019" cy="310896"/>
+            <a:ext cx="2523104" cy="310896"/>
           </a:xfrm>
           <a:prstGeom prst="roundRect">
             <a:avLst>
@@ -15163,7 +15163,7 @@
         <p:spPr>
           <a:xfrm>
             <a:off x="548640" y="420624"/>
-            <a:ext cx="2164019" cy="310896"/>
+            <a:ext cx="2523104" cy="310896"/>
           </a:xfrm>
           <a:prstGeom prst="rect">
             <a:avLst/>
@@ -16082,31 +16082,7 @@
                 <a:ea typeface="Nunito" pitchFamily="34" charset="-122"/>
                 <a:cs typeface="Nunito" pitchFamily="34" charset="-120"/>
               </a:rPr>
-              <a:t>Catalog CRUD</a:t>
-            </a:r>
-            <a:endParaRPr lang="en-US" sz="1150" dirty="0"/>
-          </a:p>
-          <a:p>
-            <a:pPr marL="177800" indent="-177800">
-              <a:lnSpc>
-                <a:spcPct val="108000"/>
-              </a:lnSpc>
-              <a:spcAft>
-                <a:spcPts val="300"/>
-              </a:spcAft>
-              <a:buSzPct val="100000"/>
-              <a:buChar char="•"/>
-            </a:pPr>
-            <a:r>
-              <a:rPr lang="en-US" sz="1150" dirty="0">
-                <a:solidFill>
-                  <a:srgbClr val="8A7A6D"/>
-                </a:solidFill>
-                <a:latin typeface="Nunito" pitchFamily="34" charset="0"/>
-                <a:ea typeface="Nunito" pitchFamily="34" charset="-122"/>
-                <a:cs typeface="Nunito" pitchFamily="34" charset="-120"/>
-              </a:rPr>
-              <a:t>(that’s admin)</a:t>
+              <a:t>Catalog CRUD — that’s admin</a:t>
             </a:r>
             <a:endParaRPr lang="en-US" sz="1150" dirty="0"/>
           </a:p>
@@ -16522,31 +16498,7 @@
                 <a:ea typeface="Nunito" pitchFamily="34" charset="-122"/>
                 <a:cs typeface="Nunito" pitchFamily="34" charset="-120"/>
               </a:rPr>
-              <a:t>Kid/parent shopping</a:t>
-            </a:r>
-            <a:endParaRPr lang="en-US" sz="1150" dirty="0"/>
-          </a:p>
-          <a:p>
-            <a:pPr marL="177800" indent="-177800">
-              <a:lnSpc>
-                <a:spcPct val="108000"/>
-              </a:lnSpc>
-              <a:spcAft>
-                <a:spcPts val="300"/>
-              </a:spcAft>
-              <a:buSzPct val="100000"/>
-              <a:buChar char="•"/>
-            </a:pPr>
-            <a:r>
-              <a:rPr lang="en-US" sz="1150" dirty="0">
-                <a:solidFill>
-                  <a:srgbClr val="8A7A6D"/>
-                </a:solidFill>
-                <a:latin typeface="Nunito" pitchFamily="34" charset="0"/>
-                <a:ea typeface="Nunito" pitchFamily="34" charset="-122"/>
-                <a:cs typeface="Nunito" pitchFamily="34" charset="-120"/>
-              </a:rPr>
-              <a:t>flows</a:t>
+              <a:t>Kid / parent shopping flows</a:t>
             </a:r>
             <a:endParaRPr lang="en-US" sz="1150" dirty="0"/>
           </a:p>
@@ -16685,7 +16637,7 @@
         <p:spPr>
           <a:xfrm>
             <a:off x="548640" y="420624"/>
-            <a:ext cx="1385499" cy="310896"/>
+            <a:ext cx="1590690" cy="310896"/>
           </a:xfrm>
           <a:prstGeom prst="roundRect">
             <a:avLst>
@@ -16707,7 +16659,7 @@
         <p:spPr>
           <a:xfrm>
             <a:off x="548640" y="420624"/>
-            <a:ext cx="1385499" cy="310896"/>
+            <a:ext cx="1590690" cy="310896"/>
           </a:xfrm>
           <a:prstGeom prst="rect">
             <a:avLst/>
@@ -17182,7 +17134,7 @@
                 <a:ea typeface="Nunito" pitchFamily="34" charset="-122"/>
                 <a:cs typeface="Nunito" pitchFamily="34" charset="-120"/>
               </a:rPr>
-              <a:t>Kid ↔ Parent toggle via 4-digit PIN</a:t>
+              <a:t>Kid / Parent toggle via 4-digit PIN</a:t>
             </a:r>
             <a:endParaRPr lang="en-US" sz="1180" dirty="0"/>
           </a:p>
@@ -17877,7 +17829,7 @@
         <p:spPr>
           <a:xfrm>
             <a:off x="548640" y="420624"/>
-            <a:ext cx="1558503" cy="310896"/>
+            <a:ext cx="1797893" cy="310896"/>
           </a:xfrm>
           <a:prstGeom prst="roundRect">
             <a:avLst>
@@ -17899,7 +17851,7 @@
         <p:spPr>
           <a:xfrm>
             <a:off x="548640" y="420624"/>
-            <a:ext cx="1558503" cy="310896"/>
+            <a:ext cx="1797893" cy="310896"/>
           </a:xfrm>
           <a:prstGeom prst="rect">
             <a:avLst/>
@@ -19799,7 +19751,7 @@
         <p:spPr>
           <a:xfrm>
             <a:off x="548640" y="420624"/>
-            <a:ext cx="1472001" cy="310896"/>
+            <a:ext cx="1694292" cy="310896"/>
           </a:xfrm>
           <a:prstGeom prst="roundRect">
             <a:avLst>
@@ -19821,7 +19773,7 @@
         <p:spPr>
           <a:xfrm>
             <a:off x="548640" y="420624"/>
-            <a:ext cx="1472001" cy="310896"/>
+            <a:ext cx="1694292" cy="310896"/>
           </a:xfrm>
           <a:prstGeom prst="rect">
             <a:avLst/>
@@ -22195,7 +22147,7 @@
         <p:spPr>
           <a:xfrm>
             <a:off x="548640" y="420624"/>
-            <a:ext cx="1472001" cy="310896"/>
+            <a:ext cx="1694292" cy="310896"/>
           </a:xfrm>
           <a:prstGeom prst="roundRect">
             <a:avLst>
@@ -22217,7 +22169,7 @@
         <p:spPr>
           <a:xfrm>
             <a:off x="548640" y="420624"/>
-            <a:ext cx="1472001" cy="310896"/>
+            <a:ext cx="1694292" cy="310896"/>
           </a:xfrm>
           <a:prstGeom prst="rect">
             <a:avLst/>
@@ -22848,12 +22800,12 @@
         </p:nvSpPr>
         <p:spPr>
           <a:xfrm>
-            <a:off x="2948940" y="4709160"/>
-            <a:ext cx="3200400" cy="1417320"/>
+            <a:off x="2720340" y="4709160"/>
+            <a:ext cx="3657600" cy="1554480"/>
           </a:xfrm>
           <a:prstGeom prst="roundRect">
             <a:avLst>
-              <a:gd name="adj" fmla="val 10323"/>
+              <a:gd name="adj" fmla="val 9412"/>
             </a:avLst>
           </a:prstGeom>
           <a:solidFill>
@@ -22882,8 +22834,8 @@
         </p:nvSpPr>
         <p:spPr>
           <a:xfrm>
-            <a:off x="2948940" y="4709160"/>
-            <a:ext cx="3200400" cy="841248"/>
+            <a:off x="2720340" y="4709160"/>
+            <a:ext cx="3657600" cy="841248"/>
           </a:xfrm>
           <a:prstGeom prst="roundRect">
             <a:avLst>
@@ -22904,8 +22856,8 @@
         </p:nvSpPr>
         <p:spPr>
           <a:xfrm>
-            <a:off x="2948940" y="5129784"/>
-            <a:ext cx="3200400" cy="420624"/>
+            <a:off x="2720340" y="5129784"/>
+            <a:ext cx="3657600" cy="420624"/>
           </a:xfrm>
           <a:prstGeom prst="rectangle">
             <a:avLst/>
@@ -22924,7 +22876,7 @@
         </p:nvSpPr>
         <p:spPr>
           <a:xfrm>
-            <a:off x="3186684" y="4910328"/>
+            <a:off x="2958084" y="4910328"/>
             <a:ext cx="457200" cy="457200"/>
           </a:xfrm>
           <a:prstGeom prst="ellipse">
@@ -22952,7 +22904,7 @@
         </p:blipFill>
         <p:spPr>
           <a:xfrm>
-            <a:off x="3305556" y="5029200"/>
+            <a:off x="3076956" y="5029200"/>
             <a:ext cx="219456" cy="219456"/>
           </a:xfrm>
           <a:prstGeom prst="rect">
@@ -22968,8 +22920,8 @@
         </p:nvSpPr>
         <p:spPr>
           <a:xfrm>
-            <a:off x="3735324" y="4910328"/>
-            <a:ext cx="2286000" cy="457200"/>
+            <a:off x="3506724" y="4910328"/>
+            <a:ext cx="2743200" cy="457200"/>
           </a:xfrm>
           <a:prstGeom prst="rect">
             <a:avLst/>
@@ -23007,8 +22959,8 @@
         </p:nvSpPr>
         <p:spPr>
           <a:xfrm>
-            <a:off x="3259836" y="5678424"/>
-            <a:ext cx="2578608" cy="320040"/>
+            <a:off x="3031236" y="5678424"/>
+            <a:ext cx="3035808" cy="457200"/>
           </a:xfrm>
           <a:prstGeom prst="rect">
             <a:avLst/>
@@ -23102,7 +23054,7 @@
                 <a:ea typeface="Nunito" pitchFamily="34" charset="-122"/>
                 <a:cs typeface="Nunito" pitchFamily="34" charset="-120"/>
               </a:rPr>
-              <a:t>◀ HTTP / JSON ▶</a:t>
+              <a:t>HTTP / JSON</a:t>
             </a:r>
             <a:endParaRPr lang="en-US" sz="950" dirty="0"/>
           </a:p>
@@ -23141,7 +23093,7 @@
         </p:nvSpPr>
         <p:spPr>
           <a:xfrm>
-            <a:off x="3909060" y="4709160"/>
+            <a:off x="3817620" y="4709160"/>
             <a:ext cx="0" cy="-502920"/>
           </a:xfrm>
           <a:prstGeom prst="line">
@@ -23165,7 +23117,7 @@
         </p:nvSpPr>
         <p:spPr>
           <a:xfrm>
-            <a:off x="5189220" y="4709160"/>
+            <a:off x="5280660" y="4709160"/>
             <a:ext cx="0" cy="-502920"/>
           </a:xfrm>
           <a:prstGeom prst="line">
@@ -23189,8 +23141,8 @@
         </p:nvSpPr>
         <p:spPr>
           <a:xfrm>
-            <a:off x="6332220" y="5029200"/>
-            <a:ext cx="2286000" cy="731520"/>
+            <a:off x="6560820" y="5029200"/>
+            <a:ext cx="2011680" cy="731520"/>
           </a:xfrm>
           <a:prstGeom prst="rect">
             <a:avLst/>
